--- a/Quadro_Aulas_Report_2026-06-05.pptx
+++ b/Quadro_Aulas_Report_2026-06-05.pptx
@@ -1038,7 +1038,7 @@
                   <a:srgbClr val="8FA3C0"/>
                 </a:solidFill>
               </a:rPr>
-              <a:t>5 de Junho de 2026 as 08:39</a:t>
+              <a:t>5 de Junho de 2026 as 16:59</a:t>
             </a:r>
             <a:endParaRPr lang="en-US" sz="700" dirty="0"/>
           </a:p>
